--- a/Computer Vision Presentation.pptx
+++ b/Computer Vision Presentation.pptx
@@ -1194,17 +1194,80 @@
           <a:lstStyle/>
           <a:p>
             <a:pPr indent="0" lvl="0" marL="0" rtl="0" algn="l">
-              <a:spcBef>
-                <a:spcPts val="0"/>
-              </a:spcBef>
-              <a:spcAft>
-                <a:spcPts val="0"/>
-              </a:spcAft>
+              <a:lnSpc>
+                <a:spcPct val="115000"/>
+              </a:lnSpc>
+              <a:spcBef>
+                <a:spcPts val="1200"/>
+              </a:spcBef>
+              <a:spcAft>
+                <a:spcPts val="0"/>
+              </a:spcAft>
+              <a:buClr>
+                <a:schemeClr val="dk1"/>
+              </a:buClr>
+              <a:buSzPts val="1100"/>
+              <a:buFont typeface="Arial"/>
               <a:buNone/>
             </a:pPr>
             <a:r>
-              <a:rPr lang="en-US"/>
-              <a:t>Aren</a:t>
+              <a:rPr lang="en-US">
+                <a:solidFill>
+                  <a:schemeClr val="dk1"/>
+                </a:solidFill>
+              </a:rPr>
+              <a:t>This project involved several important technical and modeling challenges. Initially, we attempted to implement the LSTM pipeline using TensorFlow, but encountered compatibility issues with CoreML conversion and iOS deployment. To solve this, we migrated the sequence models to PyTorch, which provided more reliable mobile deployment support.</a:t>
+            </a:r>
+            <a:endParaRPr>
+              <a:solidFill>
+                <a:schemeClr val="dk1"/>
+              </a:solidFill>
+            </a:endParaRPr>
+          </a:p>
+          <a:p>
+            <a:pPr indent="0" lvl="0" marL="0" rtl="0" algn="l">
+              <a:lnSpc>
+                <a:spcPct val="115000"/>
+              </a:lnSpc>
+              <a:spcBef>
+                <a:spcPts val="1200"/>
+              </a:spcBef>
+              <a:spcAft>
+                <a:spcPts val="0"/>
+              </a:spcAft>
+              <a:buClr>
+                <a:schemeClr val="dk1"/>
+              </a:buClr>
+              <a:buSzPts val="1100"/>
+              <a:buFont typeface="Arial"/>
+              <a:buNone/>
+            </a:pPr>
+            <a:r>
+              <a:rPr lang="en-US">
+                <a:solidFill>
+                  <a:schemeClr val="dk1"/>
+                </a:solidFill>
+              </a:rPr>
+              <a:t>Another major challenge was classification accuracy and counting in real-world conditions. Model performance was sensitive to camera angle, lighting, occlusions, and body positioning. To improve robustness, we expanded the dataset with additional scraped YouTube workout videos and evaluated the models on noisy real-world test footage to better simulate gym environments. But this could’ve definitely been improved upon in future steps that Devyani will discuss next. </a:t>
+            </a:r>
+            <a:endParaRPr>
+              <a:solidFill>
+                <a:schemeClr val="dk1"/>
+              </a:solidFill>
+            </a:endParaRPr>
+          </a:p>
+          <a:p>
+            <a:pPr indent="0" lvl="0" marL="0" rtl="0" algn="l">
+              <a:spcBef>
+                <a:spcPts val="1200"/>
+              </a:spcBef>
+              <a:spcAft>
+                <a:spcPts val="0"/>
+              </a:spcAft>
+              <a:buNone/>
+            </a:pPr>
+            <a:r>
+              <a:t/>
             </a:r>
             <a:endParaRPr/>
           </a:p>
@@ -2055,17 +2118,93 @@
           <a:lstStyle/>
           <a:p>
             <a:pPr indent="0" lvl="0" marL="0" rtl="0" algn="l">
-              <a:spcBef>
-                <a:spcPts val="0"/>
-              </a:spcBef>
-              <a:spcAft>
-                <a:spcPts val="0"/>
-              </a:spcAft>
+              <a:lnSpc>
+                <a:spcPct val="115000"/>
+              </a:lnSpc>
+              <a:spcBef>
+                <a:spcPts val="1200"/>
+              </a:spcBef>
+              <a:spcAft>
+                <a:spcPts val="0"/>
+              </a:spcAft>
+              <a:buClr>
+                <a:schemeClr val="dk1"/>
+              </a:buClr>
+              <a:buSzPts val="1100"/>
+              <a:buFont typeface="Arial"/>
               <a:buNone/>
             </a:pPr>
             <a:r>
-              <a:rPr lang="en-US"/>
-              <a:t>Aren</a:t>
+              <a:rPr lang="en-US">
+                <a:solidFill>
+                  <a:schemeClr val="dk1"/>
+                </a:solidFill>
+              </a:rPr>
+              <a:t>The classification pipeline starts by capturing workout video frames and extracting 33 MediaPipe body landmarks from each frame. From these landmarks, we created pose, angle, geometry, and velocity features, which were grouped into 48-frame temporal sequences and fed into deep learning classification models.</a:t>
+            </a:r>
+            <a:endParaRPr>
+              <a:solidFill>
+                <a:schemeClr val="dk1"/>
+              </a:solidFill>
+            </a:endParaRPr>
+          </a:p>
+          <a:p>
+            <a:pPr indent="0" lvl="0" marL="0" rtl="0" algn="l">
+              <a:lnSpc>
+                <a:spcPct val="115000"/>
+              </a:lnSpc>
+              <a:spcBef>
+                <a:spcPts val="1200"/>
+              </a:spcBef>
+              <a:spcAft>
+                <a:spcPts val="0"/>
+              </a:spcAft>
+              <a:buClr>
+                <a:schemeClr val="dk1"/>
+              </a:buClr>
+              <a:buSzPts val="1100"/>
+              <a:buFont typeface="Arial"/>
+              <a:buNone/>
+            </a:pPr>
+            <a:r>
+              <a:rPr lang="en-US">
+                <a:solidFill>
+                  <a:schemeClr val="dk1"/>
+                </a:solidFill>
+              </a:rPr>
+              <a:t>For training for the models, we used 5-Fold GroupKFold cross-validation grouped by source video to prevent data leakage. We also applied StandardScaler normalization, pose-sequence augmentation, weighted cross-entropy loss for class imbalance, Adam optimization, early stopping, and learning-rate scheduling to improve training stability and generalization. After cross-validation, each final model was retrained using the best-performing hyperparameters.</a:t>
+            </a:r>
+            <a:endParaRPr>
+              <a:solidFill>
+                <a:schemeClr val="dk1"/>
+              </a:solidFill>
+            </a:endParaRPr>
+          </a:p>
+          <a:p>
+            <a:pPr indent="0" lvl="0" marL="0" rtl="0" algn="l">
+              <a:lnSpc>
+                <a:spcPct val="115000"/>
+              </a:lnSpc>
+              <a:spcBef>
+                <a:spcPts val="1200"/>
+              </a:spcBef>
+              <a:spcAft>
+                <a:spcPts val="1200"/>
+              </a:spcAft>
+              <a:buClr>
+                <a:schemeClr val="dk1"/>
+              </a:buClr>
+              <a:buSzPts val="1100"/>
+              <a:buFont typeface="Arial"/>
+              <a:buNone/>
+            </a:pPr>
+            <a:r>
+              <a:rPr lang="en-US">
+                <a:solidFill>
+                  <a:schemeClr val="dk1"/>
+                </a:solidFill>
+              </a:rPr>
+              <a:t>We tested four architectures — CNN, LSTM, CNN + LSTM, and TCN — to compare different approaches. The CNN focused on lightweight and efficient temporal feature extraction for faster mobile inference, while the LSTM modeled sequential movement over time through recurrent hidden states. The CNN + LSTM combined the two strategies, and the TCN used dilated convolutions and residual connections for efficient temporal sequence modeling. </a:t>
             </a:r>
             <a:endParaRPr/>
           </a:p>
@@ -2155,17 +2294,93 @@
           <a:lstStyle/>
           <a:p>
             <a:pPr indent="0" lvl="0" marL="0" rtl="0" algn="l">
-              <a:spcBef>
-                <a:spcPts val="0"/>
-              </a:spcBef>
-              <a:spcAft>
-                <a:spcPts val="0"/>
-              </a:spcAft>
+              <a:lnSpc>
+                <a:spcPct val="115000"/>
+              </a:lnSpc>
+              <a:spcBef>
+                <a:spcPts val="1200"/>
+              </a:spcBef>
+              <a:spcAft>
+                <a:spcPts val="0"/>
+              </a:spcAft>
+              <a:buClr>
+                <a:schemeClr val="dk1"/>
+              </a:buClr>
+              <a:buSzPts val="1100"/>
+              <a:buFont typeface="Arial"/>
               <a:buNone/>
             </a:pPr>
             <a:r>
-              <a:rPr lang="en-US"/>
-              <a:t>Aren</a:t>
+              <a:rPr lang="en-US">
+                <a:solidFill>
+                  <a:schemeClr val="dk1"/>
+                </a:solidFill>
+              </a:rPr>
+              <a:t>Here are the final classification results across all evaluated architectures. Overall, all models performed relatively poorly in terms of accuracy on the noisy real-world test set, despite achieving strong training and cross-validation performance. It is important to note that the test set was intentionally noisy and including YouTube text overlays, background movement, varied camera angles, and other visual distractions.</a:t>
+            </a:r>
+            <a:endParaRPr>
+              <a:solidFill>
+                <a:schemeClr val="dk1"/>
+              </a:solidFill>
+            </a:endParaRPr>
+          </a:p>
+          <a:p>
+            <a:pPr indent="0" lvl="0" marL="0" rtl="0" algn="l">
+              <a:lnSpc>
+                <a:spcPct val="115000"/>
+              </a:lnSpc>
+              <a:spcBef>
+                <a:spcPts val="1200"/>
+              </a:spcBef>
+              <a:spcAft>
+                <a:spcPts val="0"/>
+              </a:spcAft>
+              <a:buClr>
+                <a:schemeClr val="dk1"/>
+              </a:buClr>
+              <a:buSzPts val="1100"/>
+              <a:buFont typeface="Arial"/>
+              <a:buNone/>
+            </a:pPr>
+            <a:r>
+              <a:rPr lang="en-US">
+                <a:solidFill>
+                  <a:schemeClr val="dk1"/>
+                </a:solidFill>
+              </a:rPr>
+              <a:t>We ultimately selected the LSTM model for deployment because it achieved the strongest official test performance. This was likely because it is capable of capturing longer term memory which is important when movements like squats or curls may initially look similar at a point but change as you actually engage in them.</a:t>
+            </a:r>
+            <a:endParaRPr>
+              <a:solidFill>
+                <a:schemeClr val="dk1"/>
+              </a:solidFill>
+            </a:endParaRPr>
+          </a:p>
+          <a:p>
+            <a:pPr indent="0" lvl="0" marL="0" rtl="0" algn="l">
+              <a:lnSpc>
+                <a:spcPct val="115000"/>
+              </a:lnSpc>
+              <a:spcBef>
+                <a:spcPts val="1200"/>
+              </a:spcBef>
+              <a:spcAft>
+                <a:spcPts val="1200"/>
+              </a:spcAft>
+              <a:buClr>
+                <a:schemeClr val="dk1"/>
+              </a:buClr>
+              <a:buSzPts val="1100"/>
+              <a:buFont typeface="Arial"/>
+              <a:buNone/>
+            </a:pPr>
+            <a:r>
+              <a:rPr lang="en-US">
+                <a:solidFill>
+                  <a:schemeClr val="dk1"/>
+                </a:solidFill>
+              </a:rPr>
+              <a:t>The confusion matrix showed strong diagonal patterns, indicating that the model was generally successful at correctly identifying many exercises. However, some confusion still remained between biomechanically similar movements, particularly among different bench press variations. Certain exercises, such as hammer curls, were also significantly more difficult for the model to distinguish due to limited motion differences.</a:t>
             </a:r>
             <a:endParaRPr/>
           </a:p>
@@ -20620,7 +20835,7 @@
             <a:tbl>
               <a:tblPr>
                 <a:noFill/>
-                <a:tableStyleId>{C9FB9F47-BE0E-4F6E-9F85-F562EBD9602D}</a:tableStyleId>
+                <a:tableStyleId>{30AA6609-3025-4C82-A522-95C72AA5CF14}</a:tableStyleId>
               </a:tblPr>
               <a:tblGrid>
                 <a:gridCol w="1469575"/>
@@ -21070,7 +21285,7 @@
                       </a:pPr>
                       <a:r>
                         <a:rPr lang="en-US" sz="1500"/>
-                        <a:t>Angle</a:t>
+                        <a:t>PCA</a:t>
                       </a:r>
                       <a:endParaRPr sz="1500"/>
                     </a:p>
@@ -21492,7 +21707,7 @@
                       </a:pPr>
                       <a:r>
                         <a:rPr lang="en-US" sz="1500"/>
-                        <a:t>PCA</a:t>
+                        <a:t>Angle</a:t>
                       </a:r>
                       <a:endParaRPr sz="1500"/>
                     </a:p>
@@ -22394,7 +22609,7 @@
             <a:tbl>
               <a:tblPr>
                 <a:noFill/>
-                <a:tableStyleId>{3E63DF4A-92A1-4B4E-B321-3DCEE51734F9}</a:tableStyleId>
+                <a:tableStyleId>{DF0EDAAD-950B-4FCF-8CA7-8C2B3F66CF03}</a:tableStyleId>
               </a:tblPr>
               <a:tblGrid>
                 <a:gridCol w="2228850"/>
@@ -32669,7 +32884,7 @@
             <a:tbl>
               <a:tblPr>
                 <a:noFill/>
-                <a:tableStyleId>{3E63DF4A-92A1-4B4E-B321-3DCEE51734F9}</a:tableStyleId>
+                <a:tableStyleId>{DF0EDAAD-950B-4FCF-8CA7-8C2B3F66CF03}</a:tableStyleId>
               </a:tblPr>
               <a:tblGrid>
                 <a:gridCol w="1221900"/>
@@ -34335,7 +34550,7 @@
             <a:tbl>
               <a:tblPr>
                 <a:noFill/>
-                <a:tableStyleId>{3E63DF4A-92A1-4B4E-B321-3DCEE51734F9}</a:tableStyleId>
+                <a:tableStyleId>{DF0EDAAD-950B-4FCF-8CA7-8C2B3F66CF03}</a:tableStyleId>
               </a:tblPr>
               <a:tblGrid>
                 <a:gridCol w="1917375"/>
@@ -35395,9 +35610,9 @@
 </file>
 
 <file path=ppt/theme/theme1.xml><?xml version="1.0" encoding="utf-8"?>
-<a:theme xmlns:a="http://schemas.openxmlformats.org/drawingml/2006/main" xmlns:r="http://schemas.openxmlformats.org/officeDocument/2006/relationships" name="1_Office Theme">
+<a:theme xmlns:a="http://schemas.openxmlformats.org/drawingml/2006/main" xmlns:r="http://schemas.openxmlformats.org/officeDocument/2006/relationships">
   <a:themeElements>
-    <a:clrScheme name="Office">
+    <a:clrScheme name="Default">
       <a:dk1>
         <a:srgbClr val="000000"/>
       </a:dk1>
@@ -35405,34 +35620,34 @@
         <a:srgbClr val="FFFFFF"/>
       </a:lt1>
       <a:dk2>
-        <a:srgbClr val="0E2841"/>
+        <a:srgbClr val="158158"/>
       </a:dk2>
       <a:lt2>
-        <a:srgbClr val="E8E8E8"/>
+        <a:srgbClr val="F3F3F3"/>
       </a:lt2>
       <a:accent1>
-        <a:srgbClr val="156082"/>
+        <a:srgbClr val="058DC7"/>
       </a:accent1>
       <a:accent2>
-        <a:srgbClr val="E97132"/>
+        <a:srgbClr val="50B432"/>
       </a:accent2>
       <a:accent3>
-        <a:srgbClr val="196B24"/>
+        <a:srgbClr val="ED561B"/>
       </a:accent3>
       <a:accent4>
-        <a:srgbClr val="0F9ED5"/>
+        <a:srgbClr val="EDEF00"/>
       </a:accent4>
       <a:accent5>
-        <a:srgbClr val="A02B93"/>
+        <a:srgbClr val="24CBE5"/>
       </a:accent5>
       <a:accent6>
-        <a:srgbClr val="4EA72E"/>
+        <a:srgbClr val="64E572"/>
       </a:accent6>
       <a:hlink>
-        <a:srgbClr val="467886"/>
+        <a:srgbClr val="2200CC"/>
       </a:hlink>
       <a:folHlink>
-        <a:srgbClr val="96607D"/>
+        <a:srgbClr val="551A8B"/>
       </a:folHlink>
     </a:clrScheme>
     <a:fontScheme name="Office">
@@ -35953,9 +36168,9 @@
 </file>
 
 <file path=ppt/theme/theme3.xml><?xml version="1.0" encoding="utf-8"?>
-<a:theme xmlns:a="http://schemas.openxmlformats.org/drawingml/2006/main" xmlns:r="http://schemas.openxmlformats.org/officeDocument/2006/relationships">
+<a:theme xmlns:a="http://schemas.openxmlformats.org/drawingml/2006/main" xmlns:r="http://schemas.openxmlformats.org/officeDocument/2006/relationships" name="1_Office Theme">
   <a:themeElements>
-    <a:clrScheme name="Default">
+    <a:clrScheme name="Office">
       <a:dk1>
         <a:srgbClr val="000000"/>
       </a:dk1>
@@ -35963,34 +36178,34 @@
         <a:srgbClr val="FFFFFF"/>
       </a:lt1>
       <a:dk2>
-        <a:srgbClr val="158158"/>
+        <a:srgbClr val="0E2841"/>
       </a:dk2>
       <a:lt2>
-        <a:srgbClr val="F3F3F3"/>
+        <a:srgbClr val="E8E8E8"/>
       </a:lt2>
       <a:accent1>
-        <a:srgbClr val="058DC7"/>
+        <a:srgbClr val="156082"/>
       </a:accent1>
       <a:accent2>
-        <a:srgbClr val="50B432"/>
+        <a:srgbClr val="E97132"/>
       </a:accent2>
       <a:accent3>
-        <a:srgbClr val="ED561B"/>
+        <a:srgbClr val="196B24"/>
       </a:accent3>
       <a:accent4>
-        <a:srgbClr val="EDEF00"/>
+        <a:srgbClr val="0F9ED5"/>
       </a:accent4>
       <a:accent5>
-        <a:srgbClr val="24CBE5"/>
+        <a:srgbClr val="A02B93"/>
       </a:accent5>
       <a:accent6>
-        <a:srgbClr val="64E572"/>
+        <a:srgbClr val="4EA72E"/>
       </a:accent6>
       <a:hlink>
-        <a:srgbClr val="2200CC"/>
+        <a:srgbClr val="467886"/>
       </a:hlink>
       <a:folHlink>
-        <a:srgbClr val="551A8B"/>
+        <a:srgbClr val="96607D"/>
       </a:folHlink>
     </a:clrScheme>
     <a:fontScheme name="Office">
